--- a/RSOC-2026.pptx
+++ b/RSOC-2026.pptx
@@ -3948,7 +3948,7 @@
                 <a:cs typeface="Times New Roman" panose="02020603050405020304" pitchFamily="18" charset="0"/>
                 <a:sym typeface="Aadil"/>
               </a:rPr>
-              <a:t>Group  No:- 12</a:t>
+              <a:t>Group  No:- 13</a:t>
             </a:r>
           </a:p>
           <a:p>
@@ -4247,7 +4247,7 @@
                   <a:cs typeface="Times New Roman" panose="02020603050405020304" pitchFamily="18" charset="0"/>
                   <a:sym typeface="Neue Montreal Bold"/>
                 </a:rPr>
-                <a:t>GROUP-12</a:t>
+                <a:t>GROUP-13</a:t>
               </a:r>
             </a:p>
           </p:txBody>
@@ -4457,7 +4457,7 @@
                   <a:cs typeface="Times New Roman" panose="02020603050405020304" pitchFamily="18" charset="0"/>
                   <a:sym typeface="Neue Montreal Bold"/>
                 </a:rPr>
-                <a:t>GROUP-12</a:t>
+                <a:t>GROUP-13</a:t>
               </a:r>
             </a:p>
           </p:txBody>
@@ -5546,7 +5546,7 @@
                   <a:cs typeface="Times New Roman" panose="02020603050405020304" pitchFamily="18" charset="0"/>
                   <a:sym typeface="Neue Montreal Bold"/>
                 </a:rPr>
-                <a:t>GROUP-12</a:t>
+                <a:t>GROUP-13</a:t>
               </a:r>
             </a:p>
           </p:txBody>
@@ -6067,7 +6067,7 @@
                   <a:cs typeface="Times New Roman" panose="02020603050405020304" pitchFamily="18" charset="0"/>
                   <a:sym typeface="Neue Montreal Bold"/>
                 </a:rPr>
-                <a:t>GROUP-12</a:t>
+                <a:t>GROUP-13</a:t>
               </a:r>
             </a:p>
           </p:txBody>
@@ -6815,7 +6815,7 @@
                   <a:cs typeface="Times New Roman" panose="02020603050405020304" pitchFamily="18" charset="0"/>
                   <a:sym typeface="Neue Montreal Bold"/>
                 </a:rPr>
-                <a:t>GROUP-12</a:t>
+                <a:t>GROUP-13</a:t>
               </a:r>
             </a:p>
           </p:txBody>
@@ -7437,7 +7437,7 @@
                 </a:lnSpc>
               </a:pPr>
               <a:r>
-                <a:rPr lang="en-US" sz="2799" b="1" dirty="0">
+                <a:rPr lang="en-US" sz="2799" b="1">
                   <a:solidFill>
                     <a:srgbClr val="FFFFFF"/>
                   </a:solidFill>
@@ -7446,8 +7446,17 @@
                   <a:cs typeface="Neue Montreal Bold"/>
                   <a:sym typeface="Neue Montreal Bold"/>
                 </a:rPr>
-                <a:t>GROUP-12</a:t>
+                <a:t>GROUP-13</a:t>
               </a:r>
+              <a:endParaRPr lang="en-US" sz="2799" b="1" dirty="0">
+                <a:solidFill>
+                  <a:srgbClr val="FFFFFF"/>
+                </a:solidFill>
+                <a:latin typeface="Neue Montreal Bold"/>
+                <a:ea typeface="Neue Montreal Bold"/>
+                <a:cs typeface="Neue Montreal Bold"/>
+                <a:sym typeface="Neue Montreal Bold"/>
+              </a:endParaRPr>
             </a:p>
           </p:txBody>
         </p:sp>
